--- a/ebpf.pptx
+++ b/ebpf.pptx
@@ -54,7 +54,7 @@
       </p:grpSpPr>
       <p:sp>
         <p:nvSpPr>
-          <p:cNvPr id="610583831" name="Header Placeholder 1"/>
+          <p:cNvPr id="835384947" name="Header Placeholder 1"/>
           <p:cNvSpPr>
             <a:spLocks noGrp="1"/>
           </p:cNvSpPr>
@@ -88,7 +88,7 @@
       </p:sp>
       <p:sp>
         <p:nvSpPr>
-          <p:cNvPr id="1800335437" name="Date Placeholder 2"/>
+          <p:cNvPr id="1300379888" name="Date Placeholder 2"/>
           <p:cNvSpPr>
             <a:spLocks noGrp="1"/>
           </p:cNvSpPr>
@@ -122,7 +122,7 @@
       </p:sp>
       <p:sp>
         <p:nvSpPr>
-          <p:cNvPr id="860466118" name="Date Placeholder 2"/>
+          <p:cNvPr id="1952568638" name="Date Placeholder 2"/>
           <p:cNvSpPr>
             <a:spLocks noGrp="1"/>
           </p:cNvSpPr>
@@ -156,7 +156,7 @@
       </p:sp>
       <p:sp>
         <p:nvSpPr>
-          <p:cNvPr id="2017283600" name="Notes Placeholder 4"/>
+          <p:cNvPr id="1346165105" name="Notes Placeholder 4"/>
           <p:cNvSpPr>
             <a:spLocks noGrp="1"/>
           </p:cNvSpPr>
@@ -186,7 +186,7 @@
       </p:sp>
       <p:sp>
         <p:nvSpPr>
-          <p:cNvPr id="1995661854" name="Footer Placeholder 5"/>
+          <p:cNvPr id="857584728" name="Footer Placeholder 5"/>
           <p:cNvSpPr>
             <a:spLocks noGrp="1"/>
           </p:cNvSpPr>
@@ -220,7 +220,7 @@
       </p:sp>
       <p:sp>
         <p:nvSpPr>
-          <p:cNvPr id="28866037" name="Slide Number Placeholder 6"/>
+          <p:cNvPr id="281458708" name="Slide Number Placeholder 6"/>
           <p:cNvSpPr>
             <a:spLocks noGrp="1"/>
           </p:cNvSpPr>
@@ -369,7 +369,7 @@
       </p:grpSpPr>
       <p:sp>
         <p:nvSpPr>
-          <p:cNvPr id="675396940" name="Slide Image Placeholder 1"/>
+          <p:cNvPr id="308656969" name="Slide Image Placeholder 1"/>
           <p:cNvSpPr>
             <a:spLocks noChangeAspect="1" noGrp="1" noRot="1"/>
           </p:cNvSpPr>
@@ -381,7 +381,7 @@
       </p:sp>
       <p:sp>
         <p:nvSpPr>
-          <p:cNvPr id="1276057967" name="Notes Placeholder 2"/>
+          <p:cNvPr id="1958103117" name="Notes Placeholder 2"/>
           <p:cNvSpPr>
             <a:spLocks noGrp="1"/>
           </p:cNvSpPr>
@@ -403,7 +403,7 @@
       </p:sp>
       <p:sp>
         <p:nvSpPr>
-          <p:cNvPr id="1322761589" name="Slide Number Placeholder 3"/>
+          <p:cNvPr id="360797216" name="Slide Number Placeholder 3"/>
           <p:cNvSpPr>
             <a:spLocks noGrp="1"/>
           </p:cNvSpPr>
@@ -454,7 +454,7 @@
       </p:grpSpPr>
       <p:sp>
         <p:nvSpPr>
-          <p:cNvPr id="1739017888" name="Slide Image Placeholder 1"/>
+          <p:cNvPr id="808144495" name="Slide Image Placeholder 1"/>
           <p:cNvSpPr>
             <a:spLocks noChangeAspect="1" noGrp="1" noRot="1"/>
           </p:cNvSpPr>
@@ -466,7 +466,7 @@
       </p:sp>
       <p:sp>
         <p:nvSpPr>
-          <p:cNvPr id="1601592690" name="Notes Placeholder 2"/>
+          <p:cNvPr id="894575206" name="Notes Placeholder 2"/>
           <p:cNvSpPr>
             <a:spLocks noGrp="1"/>
           </p:cNvSpPr>
@@ -488,7 +488,7 @@
       </p:sp>
       <p:sp>
         <p:nvSpPr>
-          <p:cNvPr id="1197902130" name="Slide Number Placeholder 3"/>
+          <p:cNvPr id="2087557083" name="Slide Number Placeholder 3"/>
           <p:cNvSpPr>
             <a:spLocks noGrp="1"/>
           </p:cNvSpPr>
@@ -539,7 +539,7 @@
       </p:grpSpPr>
       <p:sp>
         <p:nvSpPr>
-          <p:cNvPr id="411010963" name="Slide Image Placeholder 1"/>
+          <p:cNvPr id="366737325" name="Slide Image Placeholder 1"/>
           <p:cNvSpPr>
             <a:spLocks noChangeAspect="1" noGrp="1" noRot="1"/>
           </p:cNvSpPr>
@@ -551,7 +551,7 @@
       </p:sp>
       <p:sp>
         <p:nvSpPr>
-          <p:cNvPr id="1712004823" name="Notes Placeholder 2"/>
+          <p:cNvPr id="854417075" name="Notes Placeholder 2"/>
           <p:cNvSpPr>
             <a:spLocks noGrp="1"/>
           </p:cNvSpPr>
@@ -573,7 +573,7 @@
       </p:sp>
       <p:sp>
         <p:nvSpPr>
-          <p:cNvPr id="853555743" name="Slide Number Placeholder 3"/>
+          <p:cNvPr id="1774562567" name="Slide Number Placeholder 3"/>
           <p:cNvSpPr>
             <a:spLocks noGrp="1"/>
           </p:cNvSpPr>
@@ -624,7 +624,7 @@
       </p:grpSpPr>
       <p:sp>
         <p:nvSpPr>
-          <p:cNvPr id="1815632600" name="Slide Image Placeholder 1"/>
+          <p:cNvPr id="21510138" name="Slide Image Placeholder 1"/>
           <p:cNvSpPr>
             <a:spLocks noChangeAspect="1" noGrp="1" noRot="1"/>
           </p:cNvSpPr>
@@ -636,7 +636,7 @@
       </p:sp>
       <p:sp>
         <p:nvSpPr>
-          <p:cNvPr id="782592572" name="Notes Placeholder 2"/>
+          <p:cNvPr id="2144485929" name="Notes Placeholder 2"/>
           <p:cNvSpPr>
             <a:spLocks noGrp="1"/>
           </p:cNvSpPr>
@@ -658,7 +658,7 @@
       </p:sp>
       <p:sp>
         <p:nvSpPr>
-          <p:cNvPr id="609130418" name="Slide Number Placeholder 3"/>
+          <p:cNvPr id="987635785" name="Slide Number Placeholder 3"/>
           <p:cNvSpPr>
             <a:spLocks noGrp="1"/>
           </p:cNvSpPr>
@@ -709,7 +709,7 @@
       </p:grpSpPr>
       <p:sp>
         <p:nvSpPr>
-          <p:cNvPr id="1419405063" name="Slide Image Placeholder 1"/>
+          <p:cNvPr id="1462964885" name="Slide Image Placeholder 1"/>
           <p:cNvSpPr>
             <a:spLocks noChangeAspect="1" noGrp="1" noRot="1"/>
           </p:cNvSpPr>
@@ -721,7 +721,7 @@
       </p:sp>
       <p:sp>
         <p:nvSpPr>
-          <p:cNvPr id="19753364" name="Notes Placeholder 2"/>
+          <p:cNvPr id="323221785" name="Notes Placeholder 2"/>
           <p:cNvSpPr>
             <a:spLocks noGrp="1"/>
           </p:cNvSpPr>
@@ -743,7 +743,7 @@
       </p:sp>
       <p:sp>
         <p:nvSpPr>
-          <p:cNvPr id="2018726943" name="Slide Number Placeholder 3"/>
+          <p:cNvPr id="1879627386" name="Slide Number Placeholder 3"/>
           <p:cNvSpPr>
             <a:spLocks noGrp="1"/>
           </p:cNvSpPr>
@@ -794,7 +794,7 @@
       </p:grpSpPr>
       <p:sp>
         <p:nvSpPr>
-          <p:cNvPr id="1329957851" name="Slide Image Placeholder 1"/>
+          <p:cNvPr id="219088729" name="Slide Image Placeholder 1"/>
           <p:cNvSpPr>
             <a:spLocks noChangeAspect="1" noGrp="1" noRot="1"/>
           </p:cNvSpPr>
@@ -806,7 +806,7 @@
       </p:sp>
       <p:sp>
         <p:nvSpPr>
-          <p:cNvPr id="2110213282" name="Notes Placeholder 2"/>
+          <p:cNvPr id="180748104" name="Notes Placeholder 2"/>
           <p:cNvSpPr>
             <a:spLocks noGrp="1"/>
           </p:cNvSpPr>
@@ -828,7 +828,7 @@
       </p:sp>
       <p:sp>
         <p:nvSpPr>
-          <p:cNvPr id="100918911" name="Slide Number Placeholder 3"/>
+          <p:cNvPr id="416882771" name="Slide Number Placeholder 3"/>
           <p:cNvSpPr>
             <a:spLocks noGrp="1"/>
           </p:cNvSpPr>
@@ -879,7 +879,7 @@
       </p:grpSpPr>
       <p:sp>
         <p:nvSpPr>
-          <p:cNvPr id="1609654975" name="Slide Image Placeholder 1"/>
+          <p:cNvPr id="1883923621" name="Slide Image Placeholder 1"/>
           <p:cNvSpPr>
             <a:spLocks noChangeAspect="1" noGrp="1" noRot="1"/>
           </p:cNvSpPr>
@@ -891,7 +891,7 @@
       </p:sp>
       <p:sp>
         <p:nvSpPr>
-          <p:cNvPr id="2144204629" name="Notes Placeholder 2"/>
+          <p:cNvPr id="519340277" name="Notes Placeholder 2"/>
           <p:cNvSpPr>
             <a:spLocks noGrp="1"/>
           </p:cNvSpPr>
@@ -913,7 +913,7 @@
       </p:sp>
       <p:sp>
         <p:nvSpPr>
-          <p:cNvPr id="941365255" name="Slide Number Placeholder 3"/>
+          <p:cNvPr id="1104151954" name="Slide Number Placeholder 3"/>
           <p:cNvSpPr>
             <a:spLocks noGrp="1"/>
           </p:cNvSpPr>
@@ -964,7 +964,7 @@
       </p:grpSpPr>
       <p:sp>
         <p:nvSpPr>
-          <p:cNvPr id="1157808204" name="Slide Image Placeholder 1"/>
+          <p:cNvPr id="1383768052" name="Slide Image Placeholder 1"/>
           <p:cNvSpPr>
             <a:spLocks noChangeAspect="1" noGrp="1" noRot="1"/>
           </p:cNvSpPr>
@@ -976,7 +976,7 @@
       </p:sp>
       <p:sp>
         <p:nvSpPr>
-          <p:cNvPr id="873745857" name="Notes Placeholder 2"/>
+          <p:cNvPr id="1980999073" name="Notes Placeholder 2"/>
           <p:cNvSpPr>
             <a:spLocks noGrp="1"/>
           </p:cNvSpPr>
@@ -998,7 +998,7 @@
       </p:sp>
       <p:sp>
         <p:nvSpPr>
-          <p:cNvPr id="1668654279" name="Slide Number Placeholder 3"/>
+          <p:cNvPr id="858402837" name="Slide Number Placeholder 3"/>
           <p:cNvSpPr>
             <a:spLocks noGrp="1"/>
           </p:cNvSpPr>
@@ -1049,7 +1049,7 @@
       </p:grpSpPr>
       <p:sp>
         <p:nvSpPr>
-          <p:cNvPr id="1100578152" name="Slide Image Placeholder 1"/>
+          <p:cNvPr id="858652896" name="Slide Image Placeholder 1"/>
           <p:cNvSpPr>
             <a:spLocks noChangeAspect="1" noGrp="1" noRot="1"/>
           </p:cNvSpPr>
@@ -1061,7 +1061,7 @@
       </p:sp>
       <p:sp>
         <p:nvSpPr>
-          <p:cNvPr id="108919851" name="Notes Placeholder 2"/>
+          <p:cNvPr id="435980850" name="Notes Placeholder 2"/>
           <p:cNvSpPr>
             <a:spLocks noGrp="1"/>
           </p:cNvSpPr>
@@ -1083,7 +1083,7 @@
       </p:sp>
       <p:sp>
         <p:nvSpPr>
-          <p:cNvPr id="833235372" name="Slide Number Placeholder 3"/>
+          <p:cNvPr id="422913205" name="Slide Number Placeholder 3"/>
           <p:cNvSpPr>
             <a:spLocks noGrp="1"/>
           </p:cNvSpPr>
@@ -1134,7 +1134,7 @@
       </p:grpSpPr>
       <p:sp>
         <p:nvSpPr>
-          <p:cNvPr id="445950210" name="Slide Image Placeholder 1"/>
+          <p:cNvPr id="2133808666" name="Slide Image Placeholder 1"/>
           <p:cNvSpPr>
             <a:spLocks noChangeAspect="1" noGrp="1" noRot="1"/>
           </p:cNvSpPr>
@@ -1146,7 +1146,7 @@
       </p:sp>
       <p:sp>
         <p:nvSpPr>
-          <p:cNvPr id="1468516171" name="Notes Placeholder 2"/>
+          <p:cNvPr id="1480231576" name="Notes Placeholder 2"/>
           <p:cNvSpPr>
             <a:spLocks noGrp="1"/>
           </p:cNvSpPr>
@@ -1168,7 +1168,7 @@
       </p:sp>
       <p:sp>
         <p:nvSpPr>
-          <p:cNvPr id="1269714199" name="Slide Number Placeholder 3"/>
+          <p:cNvPr id="402244350" name="Slide Number Placeholder 3"/>
           <p:cNvSpPr>
             <a:spLocks noGrp="1"/>
           </p:cNvSpPr>
@@ -1219,7 +1219,7 @@
       </p:grpSpPr>
       <p:sp>
         <p:nvSpPr>
-          <p:cNvPr id="1173845681" name="Slide Image Placeholder 1"/>
+          <p:cNvPr id="1101446152" name="Slide Image Placeholder 1"/>
           <p:cNvSpPr>
             <a:spLocks noChangeAspect="1" noGrp="1" noRot="1"/>
           </p:cNvSpPr>
@@ -1231,7 +1231,7 @@
       </p:sp>
       <p:sp>
         <p:nvSpPr>
-          <p:cNvPr id="991256977" name="Notes Placeholder 2"/>
+          <p:cNvPr id="1925478004" name="Notes Placeholder 2"/>
           <p:cNvSpPr>
             <a:spLocks noGrp="1"/>
           </p:cNvSpPr>
@@ -1253,7 +1253,7 @@
       </p:sp>
       <p:sp>
         <p:nvSpPr>
-          <p:cNvPr id="924350994" name="Slide Number Placeholder 3"/>
+          <p:cNvPr id="1914470928" name="Slide Number Placeholder 3"/>
           <p:cNvSpPr>
             <a:spLocks noGrp="1"/>
           </p:cNvSpPr>
@@ -1304,7 +1304,7 @@
       </p:grpSpPr>
       <p:sp>
         <p:nvSpPr>
-          <p:cNvPr id="1057622279" name="Slide Image Placeholder 1"/>
+          <p:cNvPr id="2110443841" name="Slide Image Placeholder 1"/>
           <p:cNvSpPr>
             <a:spLocks noChangeAspect="1" noGrp="1" noRot="1"/>
           </p:cNvSpPr>
@@ -1316,7 +1316,7 @@
       </p:sp>
       <p:sp>
         <p:nvSpPr>
-          <p:cNvPr id="540843242" name="Notes Placeholder 2"/>
+          <p:cNvPr id="1357390277" name="Notes Placeholder 2"/>
           <p:cNvSpPr>
             <a:spLocks noGrp="1"/>
           </p:cNvSpPr>
@@ -1338,7 +1338,7 @@
       </p:sp>
       <p:sp>
         <p:nvSpPr>
-          <p:cNvPr id="455039219" name="Slide Number Placeholder 3"/>
+          <p:cNvPr id="977620949" name="Slide Number Placeholder 3"/>
           <p:cNvSpPr>
             <a:spLocks noGrp="1"/>
           </p:cNvSpPr>
@@ -1389,7 +1389,7 @@
       </p:grpSpPr>
       <p:sp>
         <p:nvSpPr>
-          <p:cNvPr id="1528163825" name="Slide Image Placeholder 1"/>
+          <p:cNvPr id="2129067460" name="Slide Image Placeholder 1"/>
           <p:cNvSpPr>
             <a:spLocks noChangeAspect="1" noGrp="1" noRot="1"/>
           </p:cNvSpPr>
@@ -1401,7 +1401,7 @@
       </p:sp>
       <p:sp>
         <p:nvSpPr>
-          <p:cNvPr id="618260572" name="Notes Placeholder 2"/>
+          <p:cNvPr id="340047249" name="Notes Placeholder 2"/>
           <p:cNvSpPr>
             <a:spLocks noGrp="1"/>
           </p:cNvSpPr>
@@ -1423,7 +1423,7 @@
       </p:sp>
       <p:sp>
         <p:nvSpPr>
-          <p:cNvPr id="1692553560" name="Slide Number Placeholder 3"/>
+          <p:cNvPr id="1428490657" name="Slide Number Placeholder 3"/>
           <p:cNvSpPr>
             <a:spLocks noGrp="1"/>
           </p:cNvSpPr>
@@ -1474,7 +1474,7 @@
       </p:grpSpPr>
       <p:sp>
         <p:nvSpPr>
-          <p:cNvPr id="1718859670" name="Slide Image Placeholder 1"/>
+          <p:cNvPr id="2050852608" name="Slide Image Placeholder 1"/>
           <p:cNvSpPr>
             <a:spLocks noChangeAspect="1" noGrp="1" noRot="1"/>
           </p:cNvSpPr>
@@ -1486,7 +1486,7 @@
       </p:sp>
       <p:sp>
         <p:nvSpPr>
-          <p:cNvPr id="1294323454" name="Notes Placeholder 2"/>
+          <p:cNvPr id="2050135549" name="Notes Placeholder 2"/>
           <p:cNvSpPr>
             <a:spLocks noGrp="1"/>
           </p:cNvSpPr>
@@ -1508,7 +1508,7 @@
       </p:sp>
       <p:sp>
         <p:nvSpPr>
-          <p:cNvPr id="1647053383" name="Slide Number Placeholder 3"/>
+          <p:cNvPr id="1781709866" name="Slide Number Placeholder 3"/>
           <p:cNvSpPr>
             <a:spLocks noGrp="1"/>
           </p:cNvSpPr>
@@ -1559,7 +1559,7 @@
       </p:grpSpPr>
       <p:sp>
         <p:nvSpPr>
-          <p:cNvPr id="1723841533" name="Slide Image Placeholder 1"/>
+          <p:cNvPr id="34422973" name="Slide Image Placeholder 1"/>
           <p:cNvSpPr>
             <a:spLocks noChangeAspect="1" noGrp="1" noRot="1"/>
           </p:cNvSpPr>
@@ -1571,7 +1571,7 @@
       </p:sp>
       <p:sp>
         <p:nvSpPr>
-          <p:cNvPr id="1875584949" name="Notes Placeholder 2"/>
+          <p:cNvPr id="557601495" name="Notes Placeholder 2"/>
           <p:cNvSpPr>
             <a:spLocks noGrp="1"/>
           </p:cNvSpPr>
@@ -1593,7 +1593,7 @@
       </p:sp>
       <p:sp>
         <p:nvSpPr>
-          <p:cNvPr id="1263732284" name="Slide Number Placeholder 3"/>
+          <p:cNvPr id="1815088303" name="Slide Number Placeholder 3"/>
           <p:cNvSpPr>
             <a:spLocks noGrp="1"/>
           </p:cNvSpPr>
@@ -1644,7 +1644,7 @@
       </p:grpSpPr>
       <p:sp>
         <p:nvSpPr>
-          <p:cNvPr id="58436056" name="Slide Image Placeholder 1"/>
+          <p:cNvPr id="1378300692" name="Slide Image Placeholder 1"/>
           <p:cNvSpPr>
             <a:spLocks noChangeAspect="1" noGrp="1" noRot="1"/>
           </p:cNvSpPr>
@@ -1656,7 +1656,7 @@
       </p:sp>
       <p:sp>
         <p:nvSpPr>
-          <p:cNvPr id="873847780" name="Notes Placeholder 2"/>
+          <p:cNvPr id="407137495" name="Notes Placeholder 2"/>
           <p:cNvSpPr>
             <a:spLocks noGrp="1"/>
           </p:cNvSpPr>
@@ -1678,7 +1678,7 @@
       </p:sp>
       <p:sp>
         <p:nvSpPr>
-          <p:cNvPr id="583100632" name="Slide Number Placeholder 3"/>
+          <p:cNvPr id="866409213" name="Slide Number Placeholder 3"/>
           <p:cNvSpPr>
             <a:spLocks noGrp="1"/>
           </p:cNvSpPr>
@@ -1737,7 +1737,7 @@
       </p:grpSpPr>
       <p:sp>
         <p:nvSpPr>
-          <p:cNvPr id="965796846" name="PlaceHolder 1"/>
+          <p:cNvPr id="233070382" name="PlaceHolder 1"/>
           <p:cNvSpPr>
             <a:spLocks noGrp="1"/>
           </p:cNvSpPr>
@@ -1990,7 +1990,7 @@
       </p:sp>
       <p:sp>
         <p:nvSpPr>
-          <p:cNvPr id="730725195" name="PlaceHolder 2"/>
+          <p:cNvPr id="432644600" name="PlaceHolder 2"/>
           <p:cNvSpPr>
             <a:spLocks noGrp="1"/>
           </p:cNvSpPr>
@@ -2276,7 +2276,7 @@
       </p:grpSpPr>
       <p:sp>
         <p:nvSpPr>
-          <p:cNvPr id="673363207" name="PlaceHolder 1"/>
+          <p:cNvPr id="1166224736" name="PlaceHolder 1"/>
           <p:cNvSpPr>
             <a:spLocks noGrp="1"/>
           </p:cNvSpPr>
@@ -2332,7 +2332,7 @@
       </p:sp>
       <p:sp>
         <p:nvSpPr>
-          <p:cNvPr id="411757393" name="PlaceHolder 2"/>
+          <p:cNvPr id="400764748" name="PlaceHolder 2"/>
           <p:cNvSpPr>
             <a:spLocks noGrp="1"/>
           </p:cNvSpPr>
@@ -2585,7 +2585,7 @@
       </p:sp>
       <p:sp>
         <p:nvSpPr>
-          <p:cNvPr id="1650397838" name="PlaceHolder 3"/>
+          <p:cNvPr id="1430794425" name="PlaceHolder 3"/>
           <p:cNvSpPr>
             <a:spLocks noGrp="1"/>
           </p:cNvSpPr>
@@ -2871,7 +2871,7 @@
       </p:grpSpPr>
       <p:pic>
         <p:nvPicPr>
-          <p:cNvPr id="279380950" name="Google Shape;63;p16" descr=""/>
+          <p:cNvPr id="1199947966" name="Google Shape;63;p16" descr=""/>
           <p:cNvPicPr/>
           <p:nvPr/>
         </p:nvPicPr>
@@ -2896,7 +2896,7 @@
       </p:pic>
       <p:pic>
         <p:nvPicPr>
-          <p:cNvPr id="1927801483" name="Google Shape;64;p16" descr=""/>
+          <p:cNvPr id="2066977309" name="Google Shape;64;p16" descr=""/>
           <p:cNvPicPr/>
           <p:nvPr/>
         </p:nvPicPr>
@@ -2920,7 +2920,7 @@
       </p:pic>
       <p:pic>
         <p:nvPicPr>
-          <p:cNvPr id="829316655" name="Google Shape;65;p16" descr=""/>
+          <p:cNvPr id="1720935983" name="Google Shape;65;p16" descr=""/>
           <p:cNvPicPr/>
           <p:nvPr/>
         </p:nvPicPr>
@@ -2944,7 +2944,7 @@
       </p:pic>
       <p:sp>
         <p:nvSpPr>
-          <p:cNvPr id="1770342683" name="PlaceHolder 1"/>
+          <p:cNvPr id="2107607556" name="PlaceHolder 1"/>
           <p:cNvSpPr>
             <a:spLocks noGrp="1"/>
           </p:cNvSpPr>
@@ -3197,7 +3197,7 @@
       </p:sp>
       <p:sp>
         <p:nvSpPr>
-          <p:cNvPr id="840117288" name="PlaceHolder 2"/>
+          <p:cNvPr id="365774651" name="PlaceHolder 2"/>
           <p:cNvSpPr>
             <a:spLocks noGrp="1"/>
           </p:cNvSpPr>
@@ -3450,7 +3450,7 @@
       </p:sp>
       <p:sp>
         <p:nvSpPr>
-          <p:cNvPr id="452743336" name="PlaceHolder 3"/>
+          <p:cNvPr id="1743669868" name="PlaceHolder 3"/>
           <p:cNvSpPr>
             <a:spLocks noGrp="1"/>
           </p:cNvSpPr>
@@ -3703,7 +3703,7 @@
       </p:sp>
       <p:sp>
         <p:nvSpPr>
-          <p:cNvPr id="1724567172" name="PlaceHolder 4"/>
+          <p:cNvPr id="137470844" name="PlaceHolder 4"/>
           <p:cNvSpPr>
             <a:spLocks noGrp="1"/>
           </p:cNvSpPr>
@@ -3956,7 +3956,7 @@
       </p:sp>
       <p:sp>
         <p:nvSpPr>
-          <p:cNvPr id="576860734" name="PlaceHolder 5"/>
+          <p:cNvPr id="466551451" name="PlaceHolder 5"/>
           <p:cNvSpPr>
             <a:spLocks noGrp="1"/>
           </p:cNvSpPr>
@@ -4045,7 +4045,7 @@
       </p:grpSpPr>
       <p:sp>
         <p:nvSpPr>
-          <p:cNvPr id="1475531796" name="PlaceHolder 1"/>
+          <p:cNvPr id="519356073" name="PlaceHolder 1"/>
           <p:cNvSpPr>
             <a:spLocks noGrp="1"/>
           </p:cNvSpPr>
@@ -4101,7 +4101,7 @@
       </p:sp>
       <p:sp>
         <p:nvSpPr>
-          <p:cNvPr id="2118411582" name="PlaceHolder 2"/>
+          <p:cNvPr id="2120559363" name="PlaceHolder 2"/>
           <p:cNvSpPr>
             <a:spLocks noGrp="1"/>
           </p:cNvSpPr>
@@ -4387,7 +4387,7 @@
       </p:grpSpPr>
       <p:sp>
         <p:nvSpPr>
-          <p:cNvPr id="1846288460" name="PlaceHolder 1"/>
+          <p:cNvPr id="1357416178" name="PlaceHolder 1"/>
           <p:cNvSpPr>
             <a:spLocks noGrp="1"/>
           </p:cNvSpPr>
@@ -4443,7 +4443,7 @@
       </p:sp>
       <p:sp>
         <p:nvSpPr>
-          <p:cNvPr id="613062391" name="PlaceHolder 2"/>
+          <p:cNvPr id="1262771746" name="PlaceHolder 2"/>
           <p:cNvSpPr>
             <a:spLocks noGrp="1"/>
           </p:cNvSpPr>
@@ -4729,7 +4729,7 @@
       </p:grpSpPr>
       <p:sp>
         <p:nvSpPr>
-          <p:cNvPr id="1023263501" name="PlaceHolder 1"/>
+          <p:cNvPr id="1239911732" name="PlaceHolder 1"/>
           <p:cNvSpPr>
             <a:spLocks noGrp="1"/>
           </p:cNvSpPr>
@@ -4818,7 +4818,7 @@
       </p:grpSpPr>
       <p:sp>
         <p:nvSpPr>
-          <p:cNvPr id="2075731413" name="PlaceHolder 1"/>
+          <p:cNvPr id="443034292" name="PlaceHolder 1"/>
           <p:cNvSpPr>
             <a:spLocks noGrp="1"/>
           </p:cNvSpPr>
@@ -4874,7 +4874,7 @@
       </p:sp>
       <p:sp>
         <p:nvSpPr>
-          <p:cNvPr id="1084269532" name="PlaceHolder 2"/>
+          <p:cNvPr id="858215897" name="PlaceHolder 2"/>
           <p:cNvSpPr>
             <a:spLocks noGrp="1"/>
           </p:cNvSpPr>
@@ -5127,7 +5127,7 @@
       </p:sp>
       <p:sp>
         <p:nvSpPr>
-          <p:cNvPr id="1244660447" name="PlaceHolder 3"/>
+          <p:cNvPr id="1002340541" name="PlaceHolder 3"/>
           <p:cNvSpPr>
             <a:spLocks noGrp="1"/>
           </p:cNvSpPr>
@@ -5413,7 +5413,7 @@
       </p:grpSpPr>
       <p:sp>
         <p:nvSpPr>
-          <p:cNvPr id="677056354" name="PlaceHolder 1"/>
+          <p:cNvPr id="2096381166" name="PlaceHolder 1"/>
           <p:cNvSpPr>
             <a:spLocks noGrp="1"/>
           </p:cNvSpPr>
@@ -5666,7 +5666,7 @@
       </p:sp>
       <p:sp>
         <p:nvSpPr>
-          <p:cNvPr id="545178444" name="PlaceHolder 2"/>
+          <p:cNvPr id="600214670" name="PlaceHolder 2"/>
           <p:cNvSpPr>
             <a:spLocks noGrp="1"/>
           </p:cNvSpPr>
@@ -5952,7 +5952,7 @@
       </p:grpSpPr>
       <p:sp>
         <p:nvSpPr>
-          <p:cNvPr id="70757582" name="PlaceHolder 1"/>
+          <p:cNvPr id="759472286" name="PlaceHolder 1"/>
           <p:cNvSpPr>
             <a:spLocks noGrp="1"/>
           </p:cNvSpPr>
@@ -6238,7 +6238,7 @@
       </p:grpSpPr>
       <p:sp>
         <p:nvSpPr>
-          <p:cNvPr id="1304165479" name="PlaceHolder 1"/>
+          <p:cNvPr id="418443247" name="PlaceHolder 1"/>
           <p:cNvSpPr>
             <a:spLocks noGrp="1"/>
           </p:cNvSpPr>
@@ -6294,7 +6294,7 @@
       </p:sp>
       <p:sp>
         <p:nvSpPr>
-          <p:cNvPr id="878335745" name="PlaceHolder 2"/>
+          <p:cNvPr id="1076132084" name="PlaceHolder 2"/>
           <p:cNvSpPr>
             <a:spLocks noGrp="1"/>
           </p:cNvSpPr>
@@ -6580,7 +6580,7 @@
       </p:grpSpPr>
       <p:sp>
         <p:nvSpPr>
-          <p:cNvPr id="293419546" name="Google Shape;34;p13"/>
+          <p:cNvPr id="2137676655" name="Google Shape;34;p13"/>
           <p:cNvSpPr/>
           <p:nvPr/>
         </p:nvSpPr>
@@ -6638,7 +6638,7 @@
       </p:sp>
       <p:sp>
         <p:nvSpPr>
-          <p:cNvPr id="1143078668" name="Google Shape;35;p13"/>
+          <p:cNvPr id="573592931" name="Google Shape;35;p13"/>
           <p:cNvSpPr/>
           <p:nvPr/>
         </p:nvSpPr>
@@ -6696,7 +6696,7 @@
       </p:sp>
       <p:sp>
         <p:nvSpPr>
-          <p:cNvPr id="746277152" name="Google Shape;36;p13"/>
+          <p:cNvPr id="2135613390" name="Google Shape;36;p13"/>
           <p:cNvSpPr/>
           <p:nvPr/>
         </p:nvSpPr>
@@ -6754,7 +6754,7 @@
       </p:sp>
       <p:sp>
         <p:nvSpPr>
-          <p:cNvPr id="1841375426" name="Google Shape;37;p13"/>
+          <p:cNvPr id="1294725454" name="Google Shape;37;p13"/>
           <p:cNvSpPr/>
           <p:nvPr/>
         </p:nvSpPr>
@@ -6812,7 +6812,7 @@
       </p:sp>
       <p:sp>
         <p:nvSpPr>
-          <p:cNvPr id="923188770" name="Google Shape;38;p13"/>
+          <p:cNvPr id="293849188" name="Google Shape;38;p13"/>
           <p:cNvSpPr/>
           <p:nvPr/>
         </p:nvSpPr>
@@ -6870,7 +6870,7 @@
       </p:sp>
       <p:sp>
         <p:nvSpPr>
-          <p:cNvPr id="864734604" name="Google Shape;39;p13"/>
+          <p:cNvPr id="1139335920" name="Google Shape;39;p13"/>
           <p:cNvSpPr/>
           <p:nvPr/>
         </p:nvSpPr>
@@ -6928,7 +6928,7 @@
       </p:sp>
       <p:sp>
         <p:nvSpPr>
-          <p:cNvPr id="931168586" name="PlaceHolder 1"/>
+          <p:cNvPr id="1993624680" name="PlaceHolder 1"/>
           <p:cNvSpPr>
             <a:spLocks noGrp="1"/>
           </p:cNvSpPr>
@@ -6984,7 +6984,7 @@
       </p:sp>
       <p:sp>
         <p:nvSpPr>
-          <p:cNvPr id="1551955855" name="PlaceHolder 2"/>
+          <p:cNvPr id="1001829260" name="PlaceHolder 2"/>
           <p:cNvSpPr>
             <a:spLocks noGrp="1"/>
           </p:cNvSpPr>
@@ -7237,7 +7237,7 @@
       </p:sp>
       <p:sp>
         <p:nvSpPr>
-          <p:cNvPr id="1990864663" name="PlaceHolder 3"/>
+          <p:cNvPr id="1771650171" name="PlaceHolder 3"/>
           <p:cNvSpPr>
             <a:spLocks noGrp="1"/>
           </p:cNvSpPr>
@@ -7490,7 +7490,7 @@
       </p:sp>
       <p:sp>
         <p:nvSpPr>
-          <p:cNvPr id="410313191" name="PlaceHolder 4"/>
+          <p:cNvPr id="619693060" name="PlaceHolder 4"/>
           <p:cNvSpPr>
             <a:spLocks noGrp="1"/>
           </p:cNvSpPr>
@@ -7743,7 +7743,7 @@
       </p:sp>
       <p:sp>
         <p:nvSpPr>
-          <p:cNvPr id="1217828103" name="PlaceHolder 5"/>
+          <p:cNvPr id="2015205880" name="PlaceHolder 5"/>
           <p:cNvSpPr>
             <a:spLocks noGrp="1"/>
           </p:cNvSpPr>
@@ -7996,7 +7996,7 @@
       </p:sp>
       <p:sp>
         <p:nvSpPr>
-          <p:cNvPr id="1277538770" name="PlaceHolder 6"/>
+          <p:cNvPr id="1925320766" name="PlaceHolder 6"/>
           <p:cNvSpPr>
             <a:spLocks noGrp="1"/>
           </p:cNvSpPr>
@@ -8249,7 +8249,7 @@
       </p:sp>
       <p:sp>
         <p:nvSpPr>
-          <p:cNvPr id="935019057" name="PlaceHolder 7"/>
+          <p:cNvPr id="1351156637" name="PlaceHolder 7"/>
           <p:cNvSpPr>
             <a:spLocks noGrp="1"/>
           </p:cNvSpPr>
@@ -8535,7 +8535,7 @@
       </p:grpSpPr>
       <p:sp>
         <p:nvSpPr>
-          <p:cNvPr id="1065987732" name="Google Shape;48;p14"/>
+          <p:cNvPr id="139978061" name="Google Shape;48;p14"/>
           <p:cNvSpPr/>
           <p:nvPr/>
         </p:nvSpPr>
@@ -8593,7 +8593,7 @@
       </p:sp>
       <p:sp>
         <p:nvSpPr>
-          <p:cNvPr id="901707846" name="Google Shape;49;p14"/>
+          <p:cNvPr id="351074777" name="Google Shape;49;p14"/>
           <p:cNvSpPr/>
           <p:nvPr/>
         </p:nvSpPr>
@@ -8651,7 +8651,7 @@
       </p:sp>
       <p:sp>
         <p:nvSpPr>
-          <p:cNvPr id="486636858" name="Google Shape;50;p14"/>
+          <p:cNvPr id="605932064" name="Google Shape;50;p14"/>
           <p:cNvSpPr/>
           <p:nvPr/>
         </p:nvSpPr>
@@ -8709,7 +8709,7 @@
       </p:sp>
       <p:sp>
         <p:nvSpPr>
-          <p:cNvPr id="1308461854" name="Google Shape;51;p14"/>
+          <p:cNvPr id="1268467713" name="Google Shape;51;p14"/>
           <p:cNvSpPr/>
           <p:nvPr/>
         </p:nvSpPr>
@@ -8767,7 +8767,7 @@
       </p:sp>
       <p:sp>
         <p:nvSpPr>
-          <p:cNvPr id="468070088" name="PlaceHolder 1"/>
+          <p:cNvPr id="1553155251" name="PlaceHolder 1"/>
           <p:cNvSpPr>
             <a:spLocks noGrp="1"/>
           </p:cNvSpPr>
@@ -8823,7 +8823,7 @@
       </p:sp>
       <p:sp>
         <p:nvSpPr>
-          <p:cNvPr id="408882583" name="PlaceHolder 2"/>
+          <p:cNvPr id="1826028393" name="PlaceHolder 2"/>
           <p:cNvSpPr>
             <a:spLocks noGrp="1"/>
           </p:cNvSpPr>
@@ -9076,7 +9076,7 @@
       </p:sp>
       <p:sp>
         <p:nvSpPr>
-          <p:cNvPr id="1451961660" name="PlaceHolder 3"/>
+          <p:cNvPr id="2135593310" name="PlaceHolder 3"/>
           <p:cNvSpPr>
             <a:spLocks noGrp="1"/>
           </p:cNvSpPr>
@@ -9329,7 +9329,7 @@
       </p:sp>
       <p:sp>
         <p:nvSpPr>
-          <p:cNvPr id="735508162" name="PlaceHolder 4"/>
+          <p:cNvPr id="1350755743" name="PlaceHolder 4"/>
           <p:cNvSpPr>
             <a:spLocks noGrp="1"/>
           </p:cNvSpPr>
@@ -9582,7 +9582,7 @@
       </p:sp>
       <p:sp>
         <p:nvSpPr>
-          <p:cNvPr id="1551341210" name="PlaceHolder 5"/>
+          <p:cNvPr id="37572316" name="PlaceHolder 5"/>
           <p:cNvSpPr>
             <a:spLocks noGrp="1"/>
           </p:cNvSpPr>
@@ -9835,7 +9835,7 @@
       </p:sp>
       <p:sp>
         <p:nvSpPr>
-          <p:cNvPr id="316448231" name="PlaceHolder 6"/>
+          <p:cNvPr id="1822295607" name="PlaceHolder 6"/>
           <p:cNvSpPr>
             <a:spLocks noGrp="1"/>
           </p:cNvSpPr>
@@ -10191,7 +10191,7 @@
       </p:grpSpPr>
       <p:sp>
         <p:nvSpPr>
-          <p:cNvPr id="1869067889" name="Rectángulo 65"/>
+          <p:cNvPr id="716602841" name="Rectángulo 65"/>
           <p:cNvSpPr/>
           <p:nvPr/>
         </p:nvSpPr>
@@ -10338,7 +10338,7 @@
       </p:sp>
       <p:sp>
         <p:nvSpPr>
-          <p:cNvPr id="336063477" name="Forma libre: forma 66"/>
+          <p:cNvPr id="150613705" name="Forma libre: forma 66"/>
           <p:cNvSpPr/>
           <p:nvPr/>
         </p:nvSpPr>
@@ -10400,7 +10400,7 @@
             <a:noAutofit/>
           </a:bodyPr>
           <a:p>
-            <a:pPr marL="216000" indent="-216000" defTabSz="914400">
+            <a:pPr defTabSz="914400">
               <a:lnSpc>
                 <a:spcPct val="100000"/>
               </a:lnSpc>
@@ -10410,12 +10410,6 @@
               <a:spcAft>
                 <a:spcPts val="992"/>
               </a:spcAft>
-              <a:buClr>
-                <a:srgbClr val="FFFFFF"/>
-              </a:buClr>
-              <a:buSzPct val="45000"/>
-              <a:buFont typeface="Wingdings"/>
-              <a:buChar char=""/>
               <a:defRPr/>
             </a:pPr>
             <a:r>
@@ -10438,7 +10432,7 @@
       </p:sp>
       <p:sp>
         <p:nvSpPr>
-          <p:cNvPr id="1540474530" name="Forma libre: forma 67"/>
+          <p:cNvPr id="1996354496" name="Forma libre: forma 67"/>
           <p:cNvSpPr/>
           <p:nvPr/>
         </p:nvSpPr>
@@ -10500,7 +10494,7 @@
             <a:noAutofit/>
           </a:bodyPr>
           <a:p>
-            <a:pPr marL="216000" indent="-216000" defTabSz="914400">
+            <a:pPr defTabSz="914400">
               <a:lnSpc>
                 <a:spcPct val="100000"/>
               </a:lnSpc>
@@ -10510,12 +10504,6 @@
               <a:spcAft>
                 <a:spcPts val="992"/>
               </a:spcAft>
-              <a:buClr>
-                <a:srgbClr val="FFFFFF"/>
-              </a:buClr>
-              <a:buSzPct val="45000"/>
-              <a:buFont typeface="Wingdings"/>
-              <a:buChar char=""/>
               <a:defRPr/>
             </a:pPr>
             <a:r>
@@ -10539,7 +10527,7 @@
       </p:sp>
       <p:sp>
         <p:nvSpPr>
-          <p:cNvPr id="1791847082" name="Forma libre: forma 68"/>
+          <p:cNvPr id="1066933211" name="Forma libre: forma 68"/>
           <p:cNvSpPr/>
           <p:nvPr/>
         </p:nvSpPr>
@@ -10601,7 +10589,7 @@
             <a:noAutofit/>
           </a:bodyPr>
           <a:p>
-            <a:pPr marL="216000" indent="-216000" defTabSz="914400">
+            <a:pPr defTabSz="914400">
               <a:lnSpc>
                 <a:spcPct val="100000"/>
               </a:lnSpc>
@@ -10611,12 +10599,6 @@
               <a:spcAft>
                 <a:spcPts val="992"/>
               </a:spcAft>
-              <a:buClr>
-                <a:srgbClr val="FFFFFF"/>
-              </a:buClr>
-              <a:buSzPct val="45000"/>
-              <a:buFont typeface="Wingdings"/>
-              <a:buChar char=""/>
               <a:defRPr/>
             </a:pPr>
             <a:r>
@@ -10672,7 +10654,7 @@
       </p:grpSpPr>
       <p:sp>
         <p:nvSpPr>
-          <p:cNvPr id="516949437" name="Rectángulo 69"/>
+          <p:cNvPr id="473815192" name="Rectángulo 69"/>
           <p:cNvSpPr/>
           <p:nvPr/>
         </p:nvSpPr>
@@ -10810,7 +10792,7 @@
       </p:sp>
       <p:sp>
         <p:nvSpPr>
-          <p:cNvPr id="1751271572" name="Forma libre: forma 70"/>
+          <p:cNvPr id="1103677400" name="Forma libre: forma 70"/>
           <p:cNvSpPr/>
           <p:nvPr/>
         </p:nvSpPr>
@@ -10872,7 +10854,7 @@
             <a:noAutofit/>
           </a:bodyPr>
           <a:p>
-            <a:pPr marL="216000" indent="-216000" defTabSz="914400">
+            <a:pPr defTabSz="914400">
               <a:lnSpc>
                 <a:spcPct val="100000"/>
               </a:lnSpc>
@@ -10882,12 +10864,6 @@
               <a:spcAft>
                 <a:spcPts val="992"/>
               </a:spcAft>
-              <a:buClr>
-                <a:srgbClr val="FFFFFF"/>
-              </a:buClr>
-              <a:buSzPct val="45000"/>
-              <a:buFont typeface="Wingdings"/>
-              <a:buChar char=""/>
               <a:defRPr/>
             </a:pPr>
             <a:r>
@@ -10910,7 +10886,7 @@
       </p:sp>
       <p:sp>
         <p:nvSpPr>
-          <p:cNvPr id="1778058944" name="Forma libre: forma 71"/>
+          <p:cNvPr id="1844198446" name="Forma libre: forma 71"/>
           <p:cNvSpPr/>
           <p:nvPr/>
         </p:nvSpPr>
@@ -10972,7 +10948,7 @@
             <a:noAutofit/>
           </a:bodyPr>
           <a:p>
-            <a:pPr marL="216000" indent="-216000" defTabSz="914400">
+            <a:pPr defTabSz="914400">
               <a:lnSpc>
                 <a:spcPct val="100000"/>
               </a:lnSpc>
@@ -10982,12 +10958,6 @@
               <a:spcAft>
                 <a:spcPts val="992"/>
               </a:spcAft>
-              <a:buClr>
-                <a:srgbClr val="FFFFFF"/>
-              </a:buClr>
-              <a:buSzPct val="45000"/>
-              <a:buFont typeface="Wingdings"/>
-              <a:buChar char=""/>
               <a:defRPr/>
             </a:pPr>
             <a:r>
@@ -11011,7 +10981,7 @@
       </p:sp>
       <p:sp>
         <p:nvSpPr>
-          <p:cNvPr id="1712835230" name="Forma libre: forma 72"/>
+          <p:cNvPr id="137894890" name="Forma libre: forma 72"/>
           <p:cNvSpPr/>
           <p:nvPr/>
         </p:nvSpPr>
@@ -11073,7 +11043,7 @@
             <a:noAutofit/>
           </a:bodyPr>
           <a:p>
-            <a:pPr marL="216000" indent="-216000" defTabSz="914400">
+            <a:pPr defTabSz="914400">
               <a:lnSpc>
                 <a:spcPct val="100000"/>
               </a:lnSpc>
@@ -11083,12 +11053,6 @@
               <a:spcAft>
                 <a:spcPts val="992"/>
               </a:spcAft>
-              <a:buClr>
-                <a:srgbClr val="FFFFFF"/>
-              </a:buClr>
-              <a:buSzPct val="45000"/>
-              <a:buFont typeface="Wingdings"/>
-              <a:buChar char=""/>
               <a:defRPr/>
             </a:pPr>
             <a:r>
@@ -11144,7 +11108,7 @@
       </p:grpSpPr>
       <p:sp>
         <p:nvSpPr>
-          <p:cNvPr id="679624442" name="Rectángulo 73"/>
+          <p:cNvPr id="954404685" name="Rectángulo 73"/>
           <p:cNvSpPr/>
           <p:nvPr/>
         </p:nvSpPr>
@@ -11282,7 +11246,7 @@
       </p:sp>
       <p:sp>
         <p:nvSpPr>
-          <p:cNvPr id="175381563" name="Forma libre: forma 74"/>
+          <p:cNvPr id="1696241329" name="Forma libre: forma 74"/>
           <p:cNvSpPr/>
           <p:nvPr/>
         </p:nvSpPr>
@@ -11344,7 +11308,7 @@
             <a:noAutofit/>
           </a:bodyPr>
           <a:p>
-            <a:pPr marL="216000" indent="-216000" defTabSz="914400">
+            <a:pPr defTabSz="914400">
               <a:lnSpc>
                 <a:spcPct val="100000"/>
               </a:lnSpc>
@@ -11354,12 +11318,6 @@
               <a:spcAft>
                 <a:spcPts val="992"/>
               </a:spcAft>
-              <a:buClr>
-                <a:srgbClr val="FFFFFF"/>
-              </a:buClr>
-              <a:buSzPct val="45000"/>
-              <a:buFont typeface="Wingdings"/>
-              <a:buChar char=""/>
               <a:defRPr/>
             </a:pPr>
             <a:r>
@@ -11382,7 +11340,7 @@
       </p:sp>
       <p:sp>
         <p:nvSpPr>
-          <p:cNvPr id="1295316463" name="Forma libre: forma 75"/>
+          <p:cNvPr id="1738199857" name="Forma libre: forma 75"/>
           <p:cNvSpPr/>
           <p:nvPr/>
         </p:nvSpPr>
@@ -11444,7 +11402,7 @@
             <a:noAutofit/>
           </a:bodyPr>
           <a:p>
-            <a:pPr marL="216000" indent="-216000" defTabSz="914400">
+            <a:pPr defTabSz="914400">
               <a:lnSpc>
                 <a:spcPct val="100000"/>
               </a:lnSpc>
@@ -11454,12 +11412,6 @@
               <a:spcAft>
                 <a:spcPts val="992"/>
               </a:spcAft>
-              <a:buClr>
-                <a:srgbClr val="FFFFFF"/>
-              </a:buClr>
-              <a:buSzPct val="45000"/>
-              <a:buFont typeface="Wingdings"/>
-              <a:buChar char=""/>
               <a:defRPr/>
             </a:pPr>
             <a:r>
@@ -11483,7 +11435,7 @@
       </p:sp>
       <p:sp>
         <p:nvSpPr>
-          <p:cNvPr id="47085676" name="Forma libre: forma 76"/>
+          <p:cNvPr id="2110420582" name="Forma libre: forma 76"/>
           <p:cNvSpPr/>
           <p:nvPr/>
         </p:nvSpPr>
@@ -11545,7 +11497,7 @@
             <a:noAutofit/>
           </a:bodyPr>
           <a:p>
-            <a:pPr marL="216000" indent="-216000" defTabSz="914400">
+            <a:pPr defTabSz="914400">
               <a:lnSpc>
                 <a:spcPct val="100000"/>
               </a:lnSpc>
@@ -11555,12 +11507,6 @@
               <a:spcAft>
                 <a:spcPts val="992"/>
               </a:spcAft>
-              <a:buClr>
-                <a:srgbClr val="FFFFFF"/>
-              </a:buClr>
-              <a:buSzPct val="45000"/>
-              <a:buFont typeface="Wingdings"/>
-              <a:buChar char=""/>
               <a:defRPr/>
             </a:pPr>
             <a:r>
@@ -11616,7 +11562,7 @@
       </p:grpSpPr>
       <p:sp>
         <p:nvSpPr>
-          <p:cNvPr id="2145359623" name="CuadroTexto 77"/>
+          <p:cNvPr id="1725454322" name="CuadroTexto 77"/>
           <p:cNvSpPr/>
           <p:nvPr/>
         </p:nvSpPr>
@@ -11701,7 +11647,7 @@
       </p:sp>
       <p:pic>
         <p:nvPicPr>
-          <p:cNvPr id="485014085" name="Imagen 78" descr=""/>
+          <p:cNvPr id="1704013297" name="Imagen 78" descr=""/>
           <p:cNvPicPr/>
           <p:nvPr/>
         </p:nvPicPr>
@@ -11758,7 +11704,7 @@
       </p:grpSpPr>
       <p:sp>
         <p:nvSpPr>
-          <p:cNvPr id="1091645849" name="CuadroTexto 79"/>
+          <p:cNvPr id="418292684" name="CuadroTexto 79"/>
           <p:cNvSpPr/>
           <p:nvPr/>
         </p:nvSpPr>
@@ -12159,7 +12105,7 @@
       </p:grpSpPr>
       <p:sp>
         <p:nvSpPr>
-          <p:cNvPr id="1892234024" name="CuadroTexto 79"/>
+          <p:cNvPr id="1615385459" name="CuadroTexto 79"/>
           <p:cNvSpPr/>
           <p:nvPr/>
         </p:nvSpPr>
@@ -12447,7 +12393,7 @@
       </p:grpSpPr>
       <p:sp>
         <p:nvSpPr>
-          <p:cNvPr id="547560572" name="Rectángulo 48"/>
+          <p:cNvPr id="1098392793" name="Rectángulo 48"/>
           <p:cNvSpPr/>
           <p:nvPr/>
         </p:nvSpPr>
@@ -12580,7 +12526,7 @@
       </p:grpSpPr>
       <p:pic>
         <p:nvPicPr>
-          <p:cNvPr id="1064900261" name="Imagen 49" descr=""/>
+          <p:cNvPr id="1401827509" name="Imagen 49" descr=""/>
           <p:cNvPicPr/>
           <p:nvPr/>
         </p:nvPicPr>
@@ -12604,7 +12550,7 @@
       </p:pic>
       <p:sp>
         <p:nvSpPr>
-          <p:cNvPr id="1903308357" name="Rectángulo 50"/>
+          <p:cNvPr id="1428777888" name="Rectángulo 50"/>
           <p:cNvSpPr/>
           <p:nvPr/>
         </p:nvSpPr>
@@ -12809,7 +12755,7 @@
       </p:grpSpPr>
       <p:sp>
         <p:nvSpPr>
-          <p:cNvPr id="1283866107" name="Rectángulo 51"/>
+          <p:cNvPr id="1579215826" name="Rectángulo 51"/>
           <p:cNvSpPr/>
           <p:nvPr/>
         </p:nvSpPr>
@@ -13174,7 +13120,7 @@
       </p:grpSpPr>
       <p:sp>
         <p:nvSpPr>
-          <p:cNvPr id="635044296" name="Rectángulo 52"/>
+          <p:cNvPr id="1148376620" name="Rectángulo 52"/>
           <p:cNvSpPr/>
           <p:nvPr/>
         </p:nvSpPr>
@@ -13557,7 +13503,7 @@
       </p:grpSpPr>
       <p:sp>
         <p:nvSpPr>
-          <p:cNvPr id="171574278" name="Rectángulo 53"/>
+          <p:cNvPr id="1935436093" name="Rectángulo 53"/>
           <p:cNvSpPr/>
           <p:nvPr/>
         </p:nvSpPr>
@@ -13695,7 +13641,7 @@
       </p:sp>
       <p:pic>
         <p:nvPicPr>
-          <p:cNvPr id="1775745706" name="Imagen 54" descr=""/>
+          <p:cNvPr id="1508351882" name="Imagen 54" descr=""/>
           <p:cNvPicPr/>
           <p:nvPr/>
         </p:nvPicPr>
@@ -13753,7 +13699,7 @@
       </p:grpSpPr>
       <p:sp>
         <p:nvSpPr>
-          <p:cNvPr id="1356011216" name="Rectángulo 55"/>
+          <p:cNvPr id="721365343" name="Rectángulo 55"/>
           <p:cNvSpPr/>
           <p:nvPr/>
         </p:nvSpPr>
@@ -14076,7 +14022,7 @@
       </p:sp>
       <p:grpSp>
         <p:nvGrpSpPr>
-          <p:cNvPr id="1102852048" name="Grupo 56"/>
+          <p:cNvPr id="1009320064" name="Grupo 56"/>
           <p:cNvGrpSpPr/>
           <p:nvPr/>
         </p:nvGrpSpPr>
@@ -14172,7 +14118,7 @@
       </p:grpSpPr>
       <p:sp>
         <p:nvSpPr>
-          <p:cNvPr id="376232882" name="Rectángulo 59"/>
+          <p:cNvPr id="528841336" name="Rectángulo 59"/>
           <p:cNvSpPr/>
           <p:nvPr/>
         </p:nvSpPr>
@@ -14324,7 +14270,7 @@
       </p:sp>
       <p:pic>
         <p:nvPicPr>
-          <p:cNvPr id="751115350" name="Imagen 60" descr=""/>
+          <p:cNvPr id="1435862362" name="Imagen 60" descr=""/>
           <p:cNvPicPr/>
           <p:nvPr/>
         </p:nvPicPr>
@@ -14381,7 +14327,7 @@
       </p:grpSpPr>
       <p:sp>
         <p:nvSpPr>
-          <p:cNvPr id="1266252790" name="Rectángulo 61"/>
+          <p:cNvPr id="231672245" name="Rectángulo 61"/>
           <p:cNvSpPr/>
           <p:nvPr/>
         </p:nvSpPr>
@@ -14528,7 +14474,7 @@
       </p:sp>
       <p:sp>
         <p:nvSpPr>
-          <p:cNvPr id="1625489638" name="Forma libre: forma 62"/>
+          <p:cNvPr id="695543639" name="Forma libre: forma 62"/>
           <p:cNvSpPr/>
           <p:nvPr/>
         </p:nvSpPr>
@@ -14590,16 +14536,10 @@
             <a:noAutofit/>
           </a:bodyPr>
           <a:p>
-            <a:pPr marL="216000" indent="-216000" defTabSz="914400">
-              <a:lnSpc>
-                <a:spcPct val="100000"/>
-              </a:lnSpc>
-              <a:buClr>
-                <a:srgbClr val="FFFFFF"/>
-              </a:buClr>
-              <a:buSzPct val="45000"/>
-              <a:buFont typeface="Wingdings"/>
-              <a:buChar char=""/>
+            <a:pPr defTabSz="914400">
+              <a:lnSpc>
+                <a:spcPct val="100000"/>
+              </a:lnSpc>
               <a:defRPr/>
             </a:pPr>
             <a:r>
@@ -14622,7 +14562,7 @@
       </p:sp>
       <p:sp>
         <p:nvSpPr>
-          <p:cNvPr id="1762501091" name="Forma libre: forma 63"/>
+          <p:cNvPr id="1599990879" name="Forma libre: forma 63"/>
           <p:cNvSpPr/>
           <p:nvPr/>
         </p:nvSpPr>
@@ -14684,16 +14624,10 @@
             <a:noAutofit/>
           </a:bodyPr>
           <a:p>
-            <a:pPr marL="216000" indent="-216000" defTabSz="914400">
-              <a:lnSpc>
-                <a:spcPct val="100000"/>
-              </a:lnSpc>
-              <a:buClr>
-                <a:srgbClr val="FFFFFF"/>
-              </a:buClr>
-              <a:buSzPct val="45000"/>
-              <a:buFont typeface="Wingdings"/>
-              <a:buChar char=""/>
+            <a:pPr defTabSz="914400">
+              <a:lnSpc>
+                <a:spcPct val="100000"/>
+              </a:lnSpc>
               <a:defRPr/>
             </a:pPr>
             <a:r>
@@ -14717,7 +14651,7 @@
       </p:sp>
       <p:sp>
         <p:nvSpPr>
-          <p:cNvPr id="1157337371" name="Forma libre: forma 64"/>
+          <p:cNvPr id="1198728232" name="Forma libre: forma 64"/>
           <p:cNvSpPr/>
           <p:nvPr/>
         </p:nvSpPr>
@@ -14779,16 +14713,10 @@
             <a:noAutofit/>
           </a:bodyPr>
           <a:p>
-            <a:pPr marL="216000" indent="-216000" defTabSz="914400">
-              <a:lnSpc>
-                <a:spcPct val="100000"/>
-              </a:lnSpc>
-              <a:buClr>
-                <a:srgbClr val="FFFFFF"/>
-              </a:buClr>
-              <a:buSzPct val="45000"/>
-              <a:buFont typeface="Wingdings"/>
-              <a:buChar char=""/>
+            <a:pPr defTabSz="914400">
+              <a:lnSpc>
+                <a:spcPct val="100000"/>
+              </a:lnSpc>
               <a:defRPr/>
             </a:pPr>
             <a:r>
